--- a/Day13-Prompt-Engineering/Day13_Deck_Prompt_Engineering.pptx
+++ b/Day13-Prompt-Engineering/Day13_Deck_Prompt_Engineering.pptx
@@ -5451,13 +5451,13 @@
           <a:noFill/>
         </p:spPr>
         <p:txBody>
-          <a:bodyPr wrap="square" lIns="0" rIns="0" tIns="0" bIns="0" anchor="t">
-            <a:spAutoFit/>
-          </a:bodyPr>
-          <a:lstStyle/>
-          <a:p>
-            <a:r>
-              <a:rPr sz="1275" b="0" i="0">
+          <a:bodyPr wrap="none" lIns="0" rIns="0" tIns="0" bIns="0" anchor="t">
+            <a:spAutoFit/>
+          </a:bodyPr>
+          <a:lstStyle/>
+          <a:p>
+            <a:r>
+              <a:rPr sz="1122" b="0" i="0">
                 <a:solidFill>
                   <a:srgbClr val="EAF7F5"/>
                 </a:solidFill>
@@ -5468,7 +5468,7 @@
           </a:p>
           <a:p>
             <a:r>
-              <a:rPr sz="1275" b="0" i="0">
+              <a:rPr sz="1122" b="0" i="0">
                 <a:solidFill>
                   <a:srgbClr val="EAF7F5"/>
                 </a:solidFill>
@@ -5479,7 +5479,7 @@
           </a:p>
           <a:p>
             <a:r>
-              <a:rPr sz="1275" b="0" i="0">
+              <a:rPr sz="1122" b="0" i="0">
                 <a:solidFill>
                   <a:srgbClr val="EAF7F5"/>
                 </a:solidFill>
@@ -5490,7 +5490,7 @@
           </a:p>
           <a:p>
             <a:r>
-              <a:rPr sz="1275" b="0" i="0">
+              <a:rPr sz="1122" b="0" i="0">
                 <a:solidFill>
                   <a:srgbClr val="EAF7F5"/>
                 </a:solidFill>
@@ -5501,7 +5501,7 @@
           </a:p>
           <a:p>
             <a:r>
-              <a:rPr sz="1275" b="0" i="0">
+              <a:rPr sz="1122" b="0" i="0">
                 <a:solidFill>
                   <a:srgbClr val="EAF7F5"/>
                 </a:solidFill>
@@ -5512,7 +5512,7 @@
           </a:p>
           <a:p>
             <a:r>
-              <a:rPr sz="1275" b="0" i="0">
+              <a:rPr sz="1122" b="0" i="0">
                 <a:solidFill>
                   <a:srgbClr val="EAF7F5"/>
                 </a:solidFill>
@@ -5523,7 +5523,7 @@
           </a:p>
           <a:p>
             <a:r>
-              <a:rPr sz="1275" b="0" i="0">
+              <a:rPr sz="1122" b="0" i="0">
                 <a:solidFill>
                   <a:srgbClr val="EAF7F5"/>
                 </a:solidFill>
@@ -5534,7 +5534,7 @@
           </a:p>
           <a:p>
             <a:r>
-              <a:rPr sz="1275" b="0" i="0">
+              <a:rPr sz="1122" b="0" i="0">
                 <a:solidFill>
                   <a:srgbClr val="EAF7F5"/>
                 </a:solidFill>
@@ -5545,7 +5545,7 @@
           </a:p>
           <a:p>
             <a:r>
-              <a:rPr sz="1275" b="0" i="0">
+              <a:rPr sz="1122" b="0" i="0">
                 <a:solidFill>
                   <a:srgbClr val="EAF7F5"/>
                 </a:solidFill>
@@ -5556,7 +5556,7 @@
           </a:p>
           <a:p>
             <a:r>
-              <a:rPr sz="1275" b="0" i="0">
+              <a:rPr sz="1122" b="0" i="0">
                 <a:solidFill>
                   <a:srgbClr val="EAF7F5"/>
                 </a:solidFill>
@@ -5567,7 +5567,7 @@
           </a:p>
           <a:p>
             <a:r>
-              <a:rPr sz="1275" b="0" i="0">
+              <a:rPr sz="1122" b="0" i="0">
                 <a:solidFill>
                   <a:srgbClr val="EAF7F5"/>
                 </a:solidFill>
@@ -6581,13 +6581,13 @@
           <a:noFill/>
         </p:spPr>
         <p:txBody>
-          <a:bodyPr wrap="square" lIns="0" rIns="0" tIns="0" bIns="0" anchor="t">
-            <a:spAutoFit/>
-          </a:bodyPr>
-          <a:lstStyle/>
-          <a:p>
-            <a:r>
-              <a:rPr sz="1400" b="0" i="0">
+          <a:bodyPr wrap="none" lIns="0" rIns="0" tIns="0" bIns="0" anchor="t">
+            <a:spAutoFit/>
+          </a:bodyPr>
+          <a:lstStyle/>
+          <a:p>
+            <a:r>
+              <a:rPr sz="1360" b="0" i="0">
                 <a:solidFill>
                   <a:srgbClr val="EAF7F5"/>
                 </a:solidFill>
@@ -6598,7 +6598,7 @@
           </a:p>
           <a:p>
             <a:r>
-              <a:rPr sz="1400" b="0" i="0">
+              <a:rPr sz="1360" b="0" i="0">
                 <a:solidFill>
                   <a:srgbClr val="EAF7F5"/>
                 </a:solidFill>
@@ -6609,7 +6609,7 @@
           </a:p>
           <a:p>
             <a:r>
-              <a:rPr sz="1400" b="0" i="0">
+              <a:rPr sz="1360" b="0" i="0">
                 <a:solidFill>
                   <a:srgbClr val="EAF7F5"/>
                 </a:solidFill>
@@ -6620,7 +6620,7 @@
           </a:p>
           <a:p>
             <a:r>
-              <a:rPr sz="1400" b="0" i="0">
+              <a:rPr sz="1360" b="0" i="0">
                 <a:solidFill>
                   <a:srgbClr val="EAF7F5"/>
                 </a:solidFill>
@@ -6631,7 +6631,7 @@
           </a:p>
           <a:p>
             <a:r>
-              <a:rPr sz="1400" b="0" i="0">
+              <a:rPr sz="1360" b="0" i="0">
                 <a:solidFill>
                   <a:srgbClr val="EAF7F5"/>
                 </a:solidFill>
@@ -6642,7 +6642,7 @@
           </a:p>
           <a:p>
             <a:r>
-              <a:rPr sz="1400" b="0" i="0">
+              <a:rPr sz="1360" b="0" i="0">
                 <a:solidFill>
                   <a:srgbClr val="EAF7F5"/>
                 </a:solidFill>
@@ -6653,7 +6653,7 @@
           </a:p>
           <a:p>
             <a:r>
-              <a:rPr sz="1400" b="0" i="0">
+              <a:rPr sz="1360" b="0" i="0">
                 <a:solidFill>
                   <a:srgbClr val="EAF7F5"/>
                 </a:solidFill>
@@ -6664,7 +6664,7 @@
           </a:p>
           <a:p>
             <a:r>
-              <a:rPr sz="1400" b="0" i="0">
+              <a:rPr sz="1360" b="0" i="0">
                 <a:solidFill>
                   <a:srgbClr val="EAF7F5"/>
                 </a:solidFill>
@@ -6675,7 +6675,7 @@
           </a:p>
           <a:p>
             <a:r>
-              <a:rPr sz="1400" b="0" i="0">
+              <a:rPr sz="1360" b="0" i="0">
                 <a:solidFill>
                   <a:srgbClr val="EAF7F5"/>
                 </a:solidFill>
@@ -6686,7 +6686,7 @@
           </a:p>
           <a:p>
             <a:r>
-              <a:rPr sz="1400" b="0" i="0">
+              <a:rPr sz="1360" b="0" i="0">
                 <a:solidFill>
                   <a:srgbClr val="EAF7F5"/>
                 </a:solidFill>
@@ -6697,7 +6697,7 @@
           </a:p>
           <a:p>
             <a:r>
-              <a:rPr sz="1400" b="0" i="0">
+              <a:rPr sz="1360" b="0" i="0">
                 <a:solidFill>
                   <a:srgbClr val="EAF7F5"/>
                 </a:solidFill>
@@ -6708,7 +6708,7 @@
           </a:p>
           <a:p>
             <a:r>
-              <a:rPr sz="1400" b="0" i="0">
+              <a:rPr sz="1360" b="0" i="0">
                 <a:solidFill>
                   <a:srgbClr val="EAF7F5"/>
                 </a:solidFill>
@@ -8003,13 +8003,13 @@
           <a:noFill/>
         </p:spPr>
         <p:txBody>
-          <a:bodyPr wrap="square" lIns="0" rIns="0" tIns="0" bIns="0" anchor="t">
-            <a:spAutoFit/>
-          </a:bodyPr>
-          <a:lstStyle/>
-          <a:p>
-            <a:r>
-              <a:rPr sz="1186" b="0" i="0">
+          <a:bodyPr wrap="none" lIns="0" rIns="0" tIns="0" bIns="0" anchor="t">
+            <a:spAutoFit/>
+          </a:bodyPr>
+          <a:lstStyle/>
+          <a:p>
+            <a:r>
+              <a:rPr sz="1043" b="0" i="0">
                 <a:solidFill>
                   <a:srgbClr val="EAF7F5"/>
                 </a:solidFill>
@@ -8020,7 +8020,7 @@
           </a:p>
           <a:p>
             <a:r>
-              <a:rPr sz="1186" b="0" i="0">
+              <a:rPr sz="1043" b="0" i="0">
                 <a:solidFill>
                   <a:srgbClr val="EAF7F5"/>
                 </a:solidFill>
@@ -8031,7 +8031,7 @@
           </a:p>
           <a:p>
             <a:r>
-              <a:rPr sz="1186" b="0" i="0">
+              <a:rPr sz="1043" b="0" i="0">
                 <a:solidFill>
                   <a:srgbClr val="EAF7F5"/>
                 </a:solidFill>
@@ -8042,7 +8042,7 @@
           </a:p>
           <a:p>
             <a:r>
-              <a:rPr sz="1186" b="0" i="0">
+              <a:rPr sz="1043" b="0" i="0">
                 <a:solidFill>
                   <a:srgbClr val="EAF7F5"/>
                 </a:solidFill>
@@ -8053,7 +8053,7 @@
           </a:p>
           <a:p>
             <a:r>
-              <a:rPr sz="1186" b="0" i="0">
+              <a:rPr sz="1043" b="0" i="0">
                 <a:solidFill>
                   <a:srgbClr val="EAF7F5"/>
                 </a:solidFill>
@@ -8064,7 +8064,7 @@
           </a:p>
           <a:p>
             <a:r>
-              <a:rPr sz="1186" b="0" i="0">
+              <a:rPr sz="1043" b="0" i="0">
                 <a:solidFill>
                   <a:srgbClr val="EAF7F5"/>
                 </a:solidFill>
@@ -8075,7 +8075,7 @@
           </a:p>
           <a:p>
             <a:r>
-              <a:rPr sz="1186" b="0" i="0">
+              <a:rPr sz="1043" b="0" i="0">
                 <a:solidFill>
                   <a:srgbClr val="EAF7F5"/>
                 </a:solidFill>
@@ -8086,7 +8086,7 @@
           </a:p>
           <a:p>
             <a:r>
-              <a:rPr sz="1186" b="0" i="0">
+              <a:rPr sz="1043" b="0" i="0">
                 <a:solidFill>
                   <a:srgbClr val="EAF7F5"/>
                 </a:solidFill>
@@ -8097,7 +8097,7 @@
           </a:p>
           <a:p>
             <a:r>
-              <a:rPr sz="1186" b="0" i="0">
+              <a:rPr sz="1043" b="0" i="0">
                 <a:solidFill>
                   <a:srgbClr val="EAF7F5"/>
                 </a:solidFill>
@@ -8108,7 +8108,7 @@
           </a:p>
           <a:p>
             <a:r>
-              <a:rPr sz="1186" b="0" i="0">
+              <a:rPr sz="1043" b="0" i="0">
                 <a:solidFill>
                   <a:srgbClr val="EAF7F5"/>
                 </a:solidFill>
@@ -9992,13 +9992,13 @@
           <a:noFill/>
         </p:spPr>
         <p:txBody>
-          <a:bodyPr wrap="square" lIns="0" rIns="0" tIns="0" bIns="0" anchor="t">
-            <a:spAutoFit/>
-          </a:bodyPr>
-          <a:lstStyle/>
-          <a:p>
-            <a:r>
-              <a:rPr sz="1133" b="0" i="0">
+          <a:bodyPr wrap="none" lIns="0" rIns="0" tIns="0" bIns="0" anchor="t">
+            <a:spAutoFit/>
+          </a:bodyPr>
+          <a:lstStyle/>
+          <a:p>
+            <a:r>
+              <a:rPr sz="997" b="0" i="0">
                 <a:solidFill>
                   <a:srgbClr val="EAF7F5"/>
                 </a:solidFill>
@@ -10009,7 +10009,7 @@
           </a:p>
           <a:p>
             <a:r>
-              <a:rPr sz="1133" b="0" i="0">
+              <a:rPr sz="997" b="0" i="0">
                 <a:solidFill>
                   <a:srgbClr val="EAF7F5"/>
                 </a:solidFill>
@@ -10020,7 +10020,7 @@
           </a:p>
           <a:p>
             <a:r>
-              <a:rPr sz="1133" b="0" i="0">
+              <a:rPr sz="997" b="0" i="0">
                 <a:solidFill>
                   <a:srgbClr val="EAF7F5"/>
                 </a:solidFill>
@@ -10031,7 +10031,7 @@
           </a:p>
           <a:p>
             <a:r>
-              <a:rPr sz="1133" b="0" i="0">
+              <a:rPr sz="997" b="0" i="0">
                 <a:solidFill>
                   <a:srgbClr val="EAF7F5"/>
                 </a:solidFill>
@@ -10042,7 +10042,7 @@
           </a:p>
           <a:p>
             <a:r>
-              <a:rPr sz="1133" b="0" i="0">
+              <a:rPr sz="997" b="0" i="0">
                 <a:solidFill>
                   <a:srgbClr val="EAF7F5"/>
                 </a:solidFill>
@@ -10053,7 +10053,7 @@
           </a:p>
           <a:p>
             <a:r>
-              <a:rPr sz="1133" b="0" i="0">
+              <a:rPr sz="997" b="0" i="0">
                 <a:solidFill>
                   <a:srgbClr val="EAF7F5"/>
                 </a:solidFill>
@@ -10064,7 +10064,7 @@
           </a:p>
           <a:p>
             <a:r>
-              <a:rPr sz="1133" b="0" i="0">
+              <a:rPr sz="997" b="0" i="0">
                 <a:solidFill>
                   <a:srgbClr val="EAF7F5"/>
                 </a:solidFill>
@@ -10075,7 +10075,7 @@
           </a:p>
           <a:p>
             <a:r>
-              <a:rPr sz="1133" b="0" i="0">
+              <a:rPr sz="997" b="0" i="0">
                 <a:solidFill>
                   <a:srgbClr val="EAF7F5"/>
                 </a:solidFill>
@@ -10086,7 +10086,7 @@
           </a:p>
           <a:p>
             <a:r>
-              <a:rPr sz="1133" b="0" i="0">
+              <a:rPr sz="997" b="0" i="0">
                 <a:solidFill>
                   <a:srgbClr val="EAF7F5"/>
                 </a:solidFill>
@@ -10097,7 +10097,7 @@
           </a:p>
           <a:p>
             <a:r>
-              <a:rPr sz="1133" b="0" i="0">
+              <a:rPr sz="997" b="0" i="0">
                 <a:solidFill>
                   <a:srgbClr val="EAF7F5"/>
                 </a:solidFill>
@@ -10108,7 +10108,7 @@
           </a:p>
           <a:p>
             <a:r>
-              <a:rPr sz="1133" b="0" i="0">
+              <a:rPr sz="997" b="0" i="0">
                 <a:solidFill>
                   <a:srgbClr val="EAF7F5"/>
                 </a:solidFill>
@@ -10119,7 +10119,7 @@
           </a:p>
           <a:p>
             <a:r>
-              <a:rPr sz="1133" b="0" i="0">
+              <a:rPr sz="997" b="0" i="0">
                 <a:solidFill>
                   <a:srgbClr val="EAF7F5"/>
                 </a:solidFill>
@@ -10486,13 +10486,13 @@
           <a:noFill/>
         </p:spPr>
         <p:txBody>
-          <a:bodyPr wrap="square" lIns="0" rIns="0" tIns="0" bIns="0" anchor="t">
-            <a:spAutoFit/>
-          </a:bodyPr>
-          <a:lstStyle/>
-          <a:p>
-            <a:r>
-              <a:rPr sz="1000" b="0" i="0">
+          <a:bodyPr wrap="none" lIns="0" rIns="0" tIns="0" bIns="0" anchor="t">
+            <a:spAutoFit/>
+          </a:bodyPr>
+          <a:lstStyle/>
+          <a:p>
+            <a:r>
+              <a:rPr sz="880" b="0" i="0">
                 <a:solidFill>
                   <a:srgbClr val="EAF7F5"/>
                 </a:solidFill>
@@ -10503,7 +10503,7 @@
           </a:p>
           <a:p>
             <a:r>
-              <a:rPr sz="1000" b="0" i="0">
+              <a:rPr sz="880" b="0" i="0">
                 <a:solidFill>
                   <a:srgbClr val="EAF7F5"/>
                 </a:solidFill>
@@ -10514,7 +10514,7 @@
           </a:p>
           <a:p>
             <a:r>
-              <a:rPr sz="1000" b="0" i="0">
+              <a:rPr sz="880" b="0" i="0">
                 <a:solidFill>
                   <a:srgbClr val="EAF7F5"/>
                 </a:solidFill>
@@ -10525,7 +10525,7 @@
           </a:p>
           <a:p>
             <a:r>
-              <a:rPr sz="1000" b="0" i="0">
+              <a:rPr sz="880" b="0" i="0">
                 <a:solidFill>
                   <a:srgbClr val="EAF7F5"/>
                 </a:solidFill>
@@ -10536,7 +10536,7 @@
           </a:p>
           <a:p>
             <a:r>
-              <a:rPr sz="1000" b="0" i="0">
+              <a:rPr sz="880" b="0" i="0">
                 <a:solidFill>
                   <a:srgbClr val="EAF7F5"/>
                 </a:solidFill>
@@ -10547,7 +10547,7 @@
           </a:p>
           <a:p>
             <a:r>
-              <a:rPr sz="1000" b="0" i="0">
+              <a:rPr sz="880" b="0" i="0">
                 <a:solidFill>
                   <a:srgbClr val="EAF7F5"/>
                 </a:solidFill>
@@ -10558,7 +10558,7 @@
           </a:p>
           <a:p>
             <a:r>
-              <a:rPr sz="1000" b="0" i="0">
+              <a:rPr sz="880" b="0" i="0">
                 <a:solidFill>
                   <a:srgbClr val="EAF7F5"/>
                 </a:solidFill>
@@ -13227,13 +13227,13 @@
           <a:noFill/>
         </p:spPr>
         <p:txBody>
-          <a:bodyPr wrap="square" lIns="0" rIns="0" tIns="0" bIns="0" anchor="t">
-            <a:spAutoFit/>
-          </a:bodyPr>
-          <a:lstStyle/>
-          <a:p>
-            <a:r>
-              <a:rPr sz="1400" b="0" i="0">
+          <a:bodyPr wrap="none" lIns="0" rIns="0" tIns="0" bIns="0" anchor="t">
+            <a:spAutoFit/>
+          </a:bodyPr>
+          <a:lstStyle/>
+          <a:p>
+            <a:r>
+              <a:rPr sz="1335" b="0" i="0">
                 <a:solidFill>
                   <a:srgbClr val="EAF7F5"/>
                 </a:solidFill>
@@ -13244,7 +13244,7 @@
           </a:p>
           <a:p>
             <a:r>
-              <a:rPr sz="1400" b="0" i="0">
+              <a:rPr sz="1335" b="0" i="0">
                 <a:solidFill>
                   <a:srgbClr val="EAF7F5"/>
                 </a:solidFill>
@@ -13255,7 +13255,7 @@
           </a:p>
           <a:p>
             <a:r>
-              <a:rPr sz="1400" b="0" i="0">
+              <a:rPr sz="1335" b="0" i="0">
                 <a:solidFill>
                   <a:srgbClr val="EAF7F5"/>
                 </a:solidFill>
@@ -13266,7 +13266,7 @@
           </a:p>
           <a:p>
             <a:r>
-              <a:rPr sz="1400" b="0" i="0">
+              <a:rPr sz="1335" b="0" i="0">
                 <a:solidFill>
                   <a:srgbClr val="EAF7F5"/>
                 </a:solidFill>
@@ -13277,7 +13277,7 @@
           </a:p>
           <a:p>
             <a:r>
-              <a:rPr sz="1400" b="0" i="0">
+              <a:rPr sz="1335" b="0" i="0">
                 <a:solidFill>
                   <a:srgbClr val="EAF7F5"/>
                 </a:solidFill>
@@ -13288,7 +13288,7 @@
           </a:p>
           <a:p>
             <a:r>
-              <a:rPr sz="1400" b="0" i="0">
+              <a:rPr sz="1335" b="0" i="0">
                 <a:solidFill>
                   <a:srgbClr val="EAF7F5"/>
                 </a:solidFill>
@@ -13299,7 +13299,7 @@
           </a:p>
           <a:p>
             <a:r>
-              <a:rPr sz="1400" b="0" i="0">
+              <a:rPr sz="1335" b="0" i="0">
                 <a:solidFill>
                   <a:srgbClr val="EAF7F5"/>
                 </a:solidFill>
